--- a/SYL_pitch_deck_12_slides.pptx
+++ b/SYL_pitch_deck_12_slides.pptx
@@ -264,7 +264,7 @@
         <a:p>
           <a:pPr algn="l"/>
           <a:r>
-            <a:rPr lang="vi-VN" sz="1950" dirty="0">
+            <a:rPr lang="vi-VN" sz="1800" dirty="0">
               <a:solidFill>
                 <a:srgbClr val="D8F4EF"/>
               </a:solidFill>
@@ -683,7 +683,7 @@
         <a:p>
           <a:pPr algn="l"/>
           <a:r>
-            <a:rPr lang="vi-VN" sz="3250" dirty="0">
+            <a:rPr lang="vi-VN" sz="2900" dirty="0">
               <a:b/>
               <a:solidFill>
                 <a:srgbClr val="EEFDF8"/>
@@ -721,7 +721,7 @@
         <a:p>
           <a:pPr algn="l"/>
           <a:r>
-            <a:rPr lang="vi-VN" sz="1430" dirty="0">
+            <a:rPr lang="vi-VN" sz="1320" dirty="0">
               <a:solidFill>
                 <a:srgbClr val="CFE7E3"/>
               </a:solidFill>
@@ -786,7 +786,7 @@
         <a:p>
           <a:pPr algn="l"/>
           <a:r>
-            <a:rPr lang="vi-VN" sz="1750" dirty="0">
+            <a:rPr lang="vi-VN" sz="1560" dirty="0">
               <a:b/>
               <a:solidFill>
                 <a:srgbClr val="EEFDF8"/>
@@ -824,7 +824,7 @@
         <a:p>
           <a:pPr algn="l"/>
           <a:r>
-            <a:rPr lang="vi-VN" sz="1040" dirty="0">
+            <a:rPr lang="vi-VN" sz="940" dirty="0">
               <a:solidFill>
                 <a:srgbClr val="A8C4C0"/>
               </a:solidFill>
@@ -889,7 +889,7 @@
         <a:p>
           <a:pPr algn="l"/>
           <a:r>
-            <a:rPr lang="vi-VN" sz="1750" dirty="0">
+            <a:rPr lang="vi-VN" sz="1560" dirty="0">
               <a:b/>
               <a:solidFill>
                 <a:srgbClr val="EEFDF8"/>
@@ -927,7 +927,7 @@
         <a:p>
           <a:pPr algn="l"/>
           <a:r>
-            <a:rPr lang="vi-VN" sz="1040" dirty="0">
+            <a:rPr lang="vi-VN" sz="940" dirty="0">
               <a:solidFill>
                 <a:srgbClr val="A8C4C0"/>
               </a:solidFill>
@@ -992,7 +992,7 @@
         <a:p>
           <a:pPr algn="l"/>
           <a:r>
-            <a:rPr lang="vi-VN" sz="1750" dirty="0">
+            <a:rPr lang="vi-VN" sz="1560" dirty="0">
               <a:b/>
               <a:solidFill>
                 <a:srgbClr val="EEFDF8"/>
@@ -1030,7 +1030,7 @@
         <a:p>
           <a:pPr algn="l"/>
           <a:r>
-            <a:rPr lang="vi-VN" sz="1040" dirty="0">
+            <a:rPr lang="vi-VN" sz="940" dirty="0">
               <a:solidFill>
                 <a:srgbClr val="A8C4C0"/>
               </a:solidFill>
@@ -1185,7 +1185,7 @@
         <a:p>
           <a:pPr algn="l"/>
           <a:r>
-            <a:rPr lang="vi-VN" sz="3250" dirty="0">
+            <a:rPr lang="vi-VN" sz="2900" dirty="0">
               <a:b/>
               <a:solidFill>
                 <a:srgbClr val="EEFDF8"/>
@@ -1251,7 +1251,7 @@
         <a:p>
           <a:pPr algn="l"/>
           <a:r>
-            <a:rPr lang="vi-VN" sz="1750" dirty="0">
+            <a:rPr lang="vi-VN" sz="1560" dirty="0">
               <a:b/>
               <a:solidFill>
                 <a:srgbClr val="EEFDF8"/>
@@ -1289,7 +1289,7 @@
         <a:p>
           <a:pPr algn="l"/>
           <a:r>
-            <a:rPr lang="vi-VN" sz="1040" dirty="0">
+            <a:rPr lang="vi-VN" sz="940" dirty="0">
               <a:solidFill>
                 <a:srgbClr val="A8C4C0"/>
               </a:solidFill>
@@ -1354,7 +1354,7 @@
         <a:p>
           <a:pPr algn="l"/>
           <a:r>
-            <a:rPr lang="vi-VN" sz="1750" dirty="0">
+            <a:rPr lang="vi-VN" sz="1560" dirty="0">
               <a:b/>
               <a:solidFill>
                 <a:srgbClr val="EEFDF8"/>
@@ -1392,7 +1392,7 @@
         <a:p>
           <a:pPr algn="l"/>
           <a:r>
-            <a:rPr lang="vi-VN" sz="1040" dirty="0">
+            <a:rPr lang="vi-VN" sz="940" dirty="0">
               <a:solidFill>
                 <a:srgbClr val="A8C4C0"/>
               </a:solidFill>
@@ -1457,7 +1457,7 @@
         <a:p>
           <a:pPr algn="l"/>
           <a:r>
-            <a:rPr lang="vi-VN" sz="1750" dirty="0">
+            <a:rPr lang="vi-VN" sz="1560" dirty="0">
               <a:b/>
               <a:solidFill>
                 <a:srgbClr val="EEFDF8"/>
@@ -1495,7 +1495,7 @@
         <a:p>
           <a:pPr algn="l"/>
           <a:r>
-            <a:rPr lang="vi-VN" sz="1040" dirty="0">
+            <a:rPr lang="vi-VN" sz="940" dirty="0">
               <a:solidFill>
                 <a:srgbClr val="A8C4C0"/>
               </a:solidFill>
@@ -1650,7 +1650,7 @@
         <a:p>
           <a:pPr algn="l"/>
           <a:r>
-            <a:rPr lang="vi-VN" sz="3250" dirty="0">
+            <a:rPr lang="vi-VN" sz="2900" dirty="0">
               <a:b/>
               <a:solidFill>
                 <a:srgbClr val="EEFDF8"/>
@@ -1716,7 +1716,7 @@
         <a:p>
           <a:pPr algn="l"/>
           <a:r>
-            <a:rPr lang="vi-VN" sz="1750" dirty="0">
+            <a:rPr lang="vi-VN" sz="1560" dirty="0">
               <a:b/>
               <a:solidFill>
                 <a:srgbClr val="EEFDF8"/>
@@ -1754,7 +1754,7 @@
         <a:p>
           <a:pPr algn="l"/>
           <a:r>
-            <a:rPr lang="vi-VN" sz="1040" dirty="0">
+            <a:rPr lang="vi-VN" sz="940" dirty="0">
               <a:solidFill>
                 <a:srgbClr val="A8C4C0"/>
               </a:solidFill>
@@ -1819,7 +1819,7 @@
         <a:p>
           <a:pPr algn="l"/>
           <a:r>
-            <a:rPr lang="vi-VN" sz="1750" dirty="0">
+            <a:rPr lang="vi-VN" sz="1560" dirty="0">
               <a:b/>
               <a:solidFill>
                 <a:srgbClr val="EEFDF8"/>
@@ -1857,7 +1857,7 @@
         <a:p>
           <a:pPr algn="l"/>
           <a:r>
-            <a:rPr lang="vi-VN" sz="1040" dirty="0">
+            <a:rPr lang="vi-VN" sz="940" dirty="0">
               <a:solidFill>
                 <a:srgbClr val="A8C4C0"/>
               </a:solidFill>
@@ -1922,7 +1922,7 @@
         <a:p>
           <a:pPr algn="l"/>
           <a:r>
-            <a:rPr lang="vi-VN" sz="1750" dirty="0">
+            <a:rPr lang="vi-VN" sz="1560" dirty="0">
               <a:b/>
               <a:solidFill>
                 <a:srgbClr val="EEFDF8"/>
@@ -1960,7 +1960,7 @@
         <a:p>
           <a:pPr algn="l"/>
           <a:r>
-            <a:rPr lang="vi-VN" sz="1040" dirty="0">
+            <a:rPr lang="vi-VN" sz="940" dirty="0">
               <a:solidFill>
                 <a:srgbClr val="A8C4C0"/>
               </a:solidFill>
@@ -2025,7 +2025,7 @@
         <a:p>
           <a:pPr algn="l"/>
           <a:r>
-            <a:rPr lang="vi-VN" sz="1750" dirty="0">
+            <a:rPr lang="vi-VN" sz="1560" dirty="0">
               <a:b/>
               <a:solidFill>
                 <a:srgbClr val="EEFDF8"/>
@@ -2063,7 +2063,7 @@
         <a:p>
           <a:pPr algn="l"/>
           <a:r>
-            <a:rPr lang="vi-VN" sz="1040" dirty="0">
+            <a:rPr lang="vi-VN" sz="940" dirty="0">
               <a:solidFill>
                 <a:srgbClr val="A8C4C0"/>
               </a:solidFill>
@@ -2218,7 +2218,7 @@
         <a:p>
           <a:pPr algn="l"/>
           <a:r>
-            <a:rPr lang="vi-VN" sz="3250" dirty="0">
+            <a:rPr lang="vi-VN" sz="2900" dirty="0">
               <a:b/>
               <a:solidFill>
                 <a:srgbClr val="EEFDF8"/>
@@ -2256,7 +2256,7 @@
         <a:p>
           <a:pPr algn="l"/>
           <a:r>
-            <a:rPr lang="vi-VN" sz="1430" dirty="0">
+            <a:rPr lang="vi-VN" sz="1320" dirty="0">
               <a:solidFill>
                 <a:srgbClr val="CFE7E3"/>
               </a:solidFill>
@@ -2321,7 +2321,7 @@
         <a:p>
           <a:pPr algn="l"/>
           <a:r>
-            <a:rPr lang="vi-VN" sz="1750" dirty="0">
+            <a:rPr lang="vi-VN" sz="1560" dirty="0">
               <a:b/>
               <a:solidFill>
                 <a:srgbClr val="EEFDF8"/>
@@ -2359,7 +2359,7 @@
         <a:p>
           <a:pPr algn="l"/>
           <a:r>
-            <a:rPr lang="vi-VN" sz="1040" dirty="0">
+            <a:rPr lang="vi-VN" sz="940" dirty="0">
               <a:solidFill>
                 <a:srgbClr val="A8C4C0"/>
               </a:solidFill>
@@ -2424,7 +2424,7 @@
         <a:p>
           <a:pPr algn="l"/>
           <a:r>
-            <a:rPr lang="vi-VN" sz="1750" dirty="0">
+            <a:rPr lang="vi-VN" sz="1560" dirty="0">
               <a:b/>
               <a:solidFill>
                 <a:srgbClr val="EEFDF8"/>
@@ -2462,7 +2462,7 @@
         <a:p>
           <a:pPr algn="l"/>
           <a:r>
-            <a:rPr lang="vi-VN" sz="1040" dirty="0">
+            <a:rPr lang="vi-VN" sz="940" dirty="0">
               <a:solidFill>
                 <a:srgbClr val="A8C4C0"/>
               </a:solidFill>
@@ -2527,7 +2527,7 @@
         <a:p>
           <a:pPr algn="l"/>
           <a:r>
-            <a:rPr lang="vi-VN" sz="1750" dirty="0">
+            <a:rPr lang="vi-VN" sz="1560" dirty="0">
               <a:b/>
               <a:solidFill>
                 <a:srgbClr val="EEFDF8"/>
@@ -2565,7 +2565,7 @@
         <a:p>
           <a:pPr algn="l"/>
           <a:r>
-            <a:rPr lang="vi-VN" sz="1040" dirty="0">
+            <a:rPr lang="vi-VN" sz="940" dirty="0">
               <a:solidFill>
                 <a:srgbClr val="A8C4C0"/>
               </a:solidFill>
@@ -2720,7 +2720,7 @@
         <a:p>
           <a:pPr algn="l"/>
           <a:r>
-            <a:rPr lang="vi-VN" sz="3250" dirty="0">
+            <a:rPr lang="vi-VN" sz="2900" dirty="0">
               <a:b/>
               <a:solidFill>
                 <a:srgbClr val="EEFDF8"/>
@@ -2786,7 +2786,7 @@
         <a:p>
           <a:pPr algn="l"/>
           <a:r>
-            <a:rPr lang="vi-VN" sz="3000" dirty="0">
+            <a:rPr lang="vi-VN" sz="2650" dirty="0">
               <a:b/>
               <a:solidFill>
                 <a:srgbClr val="70F0A8"/>
@@ -2824,7 +2824,7 @@
         <a:p>
           <a:pPr algn="l"/>
           <a:r>
-            <a:rPr lang="vi-VN" sz="1050" dirty="0">
+            <a:rPr lang="vi-VN" sz="960" dirty="0">
               <a:solidFill>
                 <a:srgbClr val="A8C4C0"/>
               </a:solidFill>
@@ -2889,7 +2889,7 @@
         <a:p>
           <a:pPr algn="l"/>
           <a:r>
-            <a:rPr lang="vi-VN" sz="3000" dirty="0">
+            <a:rPr lang="vi-VN" sz="2650" dirty="0">
               <a:b/>
               <a:solidFill>
                 <a:srgbClr val="70F0A8"/>
@@ -2927,7 +2927,7 @@
         <a:p>
           <a:pPr algn="l"/>
           <a:r>
-            <a:rPr lang="vi-VN" sz="1050" dirty="0">
+            <a:rPr lang="vi-VN" sz="960" dirty="0">
               <a:solidFill>
                 <a:srgbClr val="A8C4C0"/>
               </a:solidFill>
@@ -2992,7 +2992,7 @@
         <a:p>
           <a:pPr algn="l"/>
           <a:r>
-            <a:rPr lang="vi-VN" sz="3000" dirty="0">
+            <a:rPr lang="vi-VN" sz="2650" dirty="0">
               <a:b/>
               <a:solidFill>
                 <a:srgbClr val="70F0A8"/>
@@ -3030,7 +3030,7 @@
         <a:p>
           <a:pPr algn="l"/>
           <a:r>
-            <a:rPr lang="vi-VN" sz="1050" dirty="0">
+            <a:rPr lang="vi-VN" sz="960" dirty="0">
               <a:solidFill>
                 <a:srgbClr val="A8C4C0"/>
               </a:solidFill>
@@ -3095,7 +3095,7 @@
         <a:p>
           <a:pPr algn="l"/>
           <a:r>
-            <a:rPr lang="vi-VN" sz="1250" dirty="0">
+            <a:rPr lang="vi-VN" sz="1150" dirty="0">
               <a:solidFill>
                 <a:srgbClr val="D8F4EF"/>
               </a:solidFill>
@@ -3250,7 +3250,7 @@
         <a:p>
           <a:pPr algn="l"/>
           <a:r>
-            <a:rPr lang="vi-VN" sz="3250" dirty="0">
+            <a:rPr lang="vi-VN" sz="2900" dirty="0">
               <a:b/>
               <a:solidFill>
                 <a:srgbClr val="EEFDF8"/>
@@ -3288,7 +3288,7 @@
         <a:p>
           <a:pPr algn="l"/>
           <a:r>
-            <a:rPr lang="vi-VN" sz="1430" dirty="0">
+            <a:rPr lang="vi-VN" sz="1320" dirty="0">
               <a:solidFill>
                 <a:srgbClr val="CFE7E3"/>
               </a:solidFill>
@@ -3353,7 +3353,7 @@
         <a:p>
           <a:pPr algn="l"/>
           <a:r>
-            <a:rPr lang="vi-VN" sz="1750" dirty="0">
+            <a:rPr lang="vi-VN" sz="1560" dirty="0">
               <a:b/>
               <a:solidFill>
                 <a:srgbClr val="EEFDF8"/>
@@ -3391,7 +3391,7 @@
         <a:p>
           <a:pPr algn="l"/>
           <a:r>
-            <a:rPr lang="vi-VN" sz="1040" dirty="0">
+            <a:rPr lang="vi-VN" sz="940" dirty="0">
               <a:solidFill>
                 <a:srgbClr val="A8C4C0"/>
               </a:solidFill>
@@ -3456,7 +3456,7 @@
         <a:p>
           <a:pPr algn="l"/>
           <a:r>
-            <a:rPr lang="vi-VN" sz="1750" dirty="0">
+            <a:rPr lang="vi-VN" sz="1560" dirty="0">
               <a:b/>
               <a:solidFill>
                 <a:srgbClr val="EEFDF8"/>
@@ -3494,7 +3494,7 @@
         <a:p>
           <a:pPr algn="l"/>
           <a:r>
-            <a:rPr lang="vi-VN" sz="1040" dirty="0">
+            <a:rPr lang="vi-VN" sz="940" dirty="0">
               <a:solidFill>
                 <a:srgbClr val="A8C4C0"/>
               </a:solidFill>
@@ -3559,7 +3559,7 @@
         <a:p>
           <a:pPr algn="l"/>
           <a:r>
-            <a:rPr lang="vi-VN" sz="1750" dirty="0">
+            <a:rPr lang="vi-VN" sz="1560" dirty="0">
               <a:b/>
               <a:solidFill>
                 <a:srgbClr val="EEFDF8"/>
@@ -3597,7 +3597,7 @@
         <a:p>
           <a:pPr algn="l"/>
           <a:r>
-            <a:rPr lang="vi-VN" sz="1040" dirty="0">
+            <a:rPr lang="vi-VN" sz="940" dirty="0">
               <a:solidFill>
                 <a:srgbClr val="A8C4C0"/>
               </a:solidFill>
@@ -3752,7 +3752,7 @@
         <a:p>
           <a:pPr algn="l"/>
           <a:r>
-            <a:rPr lang="vi-VN" sz="3250" dirty="0">
+            <a:rPr lang="vi-VN" sz="2900" dirty="0">
               <a:b/>
               <a:solidFill>
                 <a:srgbClr val="EEFDF8"/>
@@ -3856,7 +3856,7 @@
         <a:p>
           <a:pPr algn="l"/>
           <a:r>
-            <a:rPr lang="vi-VN" sz="1550" dirty="0">
+            <a:rPr lang="vi-VN" sz="1420" dirty="0">
               <a:b/>
               <a:solidFill>
                 <a:srgbClr val="EEFDF8"/>
@@ -3894,7 +3894,7 @@
         <a:p>
           <a:pPr algn="l"/>
           <a:r>
-            <a:rPr lang="vi-VN" sz="940" dirty="0">
+            <a:rPr lang="vi-VN" sz="869" dirty="0">
               <a:solidFill>
                 <a:srgbClr val="A8C4C0"/>
               </a:solidFill>
@@ -3997,7 +3997,7 @@
         <a:p>
           <a:pPr algn="l"/>
           <a:r>
-            <a:rPr lang="vi-VN" sz="1550" dirty="0">
+            <a:rPr lang="vi-VN" sz="1420" dirty="0">
               <a:b/>
               <a:solidFill>
                 <a:srgbClr val="EEFDF8"/>
@@ -4035,7 +4035,7 @@
         <a:p>
           <a:pPr algn="l"/>
           <a:r>
-            <a:rPr lang="vi-VN" sz="940" dirty="0">
+            <a:rPr lang="vi-VN" sz="869" dirty="0">
               <a:solidFill>
                 <a:srgbClr val="A8C4C0"/>
               </a:solidFill>
@@ -4138,7 +4138,7 @@
         <a:p>
           <a:pPr algn="l"/>
           <a:r>
-            <a:rPr lang="vi-VN" sz="1550" dirty="0">
+            <a:rPr lang="vi-VN" sz="1420" dirty="0">
               <a:b/>
               <a:solidFill>
                 <a:srgbClr val="EEFDF8"/>
@@ -4176,7 +4176,7 @@
         <a:p>
           <a:pPr algn="l"/>
           <a:r>
-            <a:rPr lang="vi-VN" sz="940" dirty="0">
+            <a:rPr lang="vi-VN" sz="869" dirty="0">
               <a:solidFill>
                 <a:srgbClr val="A8C4C0"/>
               </a:solidFill>
@@ -4279,7 +4279,7 @@
         <a:p>
           <a:pPr algn="l"/>
           <a:r>
-            <a:rPr lang="vi-VN" sz="1550" dirty="0">
+            <a:rPr lang="vi-VN" sz="1420" dirty="0">
               <a:b/>
               <a:solidFill>
                 <a:srgbClr val="EEFDF8"/>
@@ -4317,7 +4317,7 @@
         <a:p>
           <a:pPr algn="l"/>
           <a:r>
-            <a:rPr lang="vi-VN" sz="940" dirty="0">
+            <a:rPr lang="vi-VN" sz="869" dirty="0">
               <a:solidFill>
                 <a:srgbClr val="A8C4C0"/>
               </a:solidFill>
@@ -4420,7 +4420,7 @@
         <a:p>
           <a:pPr algn="l"/>
           <a:r>
-            <a:rPr lang="vi-VN" sz="1550" dirty="0">
+            <a:rPr lang="vi-VN" sz="1420" dirty="0">
               <a:b/>
               <a:solidFill>
                 <a:srgbClr val="EEFDF8"/>
@@ -4458,7 +4458,7 @@
         <a:p>
           <a:pPr algn="l"/>
           <a:r>
-            <a:rPr lang="vi-VN" sz="940" dirty="0">
+            <a:rPr lang="vi-VN" sz="869" dirty="0">
               <a:solidFill>
                 <a:srgbClr val="A8C4C0"/>
               </a:solidFill>
@@ -4613,7 +4613,7 @@
         <a:p>
           <a:pPr algn="l"/>
           <a:r>
-            <a:rPr lang="vi-VN" sz="3250" dirty="0">
+            <a:rPr lang="vi-VN" sz="2900" dirty="0">
               <a:b/>
               <a:solidFill>
                 <a:srgbClr val="EEFDF8"/>
@@ -4679,7 +4679,7 @@
         <a:p>
           <a:pPr algn="l"/>
           <a:r>
-            <a:rPr lang="vi-VN" sz="1750" dirty="0">
+            <a:rPr lang="vi-VN" sz="1560" dirty="0">
               <a:b/>
               <a:solidFill>
                 <a:srgbClr val="EEFDF8"/>
@@ -4717,7 +4717,7 @@
         <a:p>
           <a:pPr algn="l"/>
           <a:r>
-            <a:rPr lang="vi-VN" sz="1040" dirty="0">
+            <a:rPr lang="vi-VN" sz="940" dirty="0">
               <a:solidFill>
                 <a:srgbClr val="A8C4C0"/>
               </a:solidFill>
@@ -4782,7 +4782,7 @@
         <a:p>
           <a:pPr algn="l"/>
           <a:r>
-            <a:rPr lang="vi-VN" sz="1750" dirty="0">
+            <a:rPr lang="vi-VN" sz="1560" dirty="0">
               <a:b/>
               <a:solidFill>
                 <a:srgbClr val="EEFDF8"/>
@@ -4820,7 +4820,7 @@
         <a:p>
           <a:pPr algn="l"/>
           <a:r>
-            <a:rPr lang="vi-VN" sz="1040" dirty="0">
+            <a:rPr lang="vi-VN" sz="940" dirty="0">
               <a:solidFill>
                 <a:srgbClr val="A8C4C0"/>
               </a:solidFill>
@@ -4885,7 +4885,7 @@
         <a:p>
           <a:pPr algn="l"/>
           <a:r>
-            <a:rPr lang="vi-VN" sz="1750" dirty="0">
+            <a:rPr lang="vi-VN" sz="1560" dirty="0">
               <a:b/>
               <a:solidFill>
                 <a:srgbClr val="EEFDF8"/>
@@ -4923,7 +4923,7 @@
         <a:p>
           <a:pPr algn="l"/>
           <a:r>
-            <a:rPr lang="vi-VN" sz="1040" dirty="0">
+            <a:rPr lang="vi-VN" sz="940" dirty="0">
               <a:solidFill>
                 <a:srgbClr val="A8C4C0"/>
               </a:solidFill>
@@ -4988,7 +4988,7 @@
         <a:p>
           <a:pPr algn="l"/>
           <a:r>
-            <a:rPr lang="vi-VN" sz="1750" dirty="0">
+            <a:rPr lang="vi-VN" sz="1560" dirty="0">
               <a:b/>
               <a:solidFill>
                 <a:srgbClr val="EEFDF8"/>
@@ -5026,7 +5026,7 @@
         <a:p>
           <a:pPr algn="l"/>
           <a:r>
-            <a:rPr lang="vi-VN" sz="1040" dirty="0">
+            <a:rPr lang="vi-VN" sz="940" dirty="0">
               <a:solidFill>
                 <a:srgbClr val="A8C4C0"/>
               </a:solidFill>
@@ -5233,7 +5233,7 @@
         <a:p>
           <a:pPr algn="l"/>
           <a:r>
-            <a:rPr lang="vi-VN" sz="3250" dirty="0">
+            <a:rPr lang="vi-VN" sz="2900" dirty="0">
               <a:b/>
               <a:solidFill>
                 <a:srgbClr val="EEFDF8"/>
@@ -5299,7 +5299,7 @@
         <a:p>
           <a:pPr algn="l"/>
           <a:r>
-            <a:rPr lang="vi-VN" sz="1750" dirty="0">
+            <a:rPr lang="vi-VN" sz="1560" dirty="0">
               <a:b/>
               <a:solidFill>
                 <a:srgbClr val="EEFDF8"/>
@@ -5337,7 +5337,7 @@
         <a:p>
           <a:pPr algn="l"/>
           <a:r>
-            <a:rPr lang="vi-VN" sz="1040" dirty="0">
+            <a:rPr lang="vi-VN" sz="940" dirty="0">
               <a:solidFill>
                 <a:srgbClr val="A8C4C0"/>
               </a:solidFill>
@@ -5402,7 +5402,7 @@
         <a:p>
           <a:pPr algn="l"/>
           <a:r>
-            <a:rPr lang="vi-VN" sz="1750" dirty="0">
+            <a:rPr lang="vi-VN" sz="1560" dirty="0">
               <a:b/>
               <a:solidFill>
                 <a:srgbClr val="EEFDF8"/>
@@ -5440,7 +5440,7 @@
         <a:p>
           <a:pPr algn="l"/>
           <a:r>
-            <a:rPr lang="vi-VN" sz="1040" dirty="0">
+            <a:rPr lang="vi-VN" sz="940" dirty="0">
               <a:solidFill>
                 <a:srgbClr val="A8C4C0"/>
               </a:solidFill>
@@ -5505,7 +5505,7 @@
         <a:p>
           <a:pPr algn="l"/>
           <a:r>
-            <a:rPr lang="vi-VN" sz="1750" dirty="0">
+            <a:rPr lang="vi-VN" sz="1560" dirty="0">
               <a:b/>
               <a:solidFill>
                 <a:srgbClr val="EEFDF8"/>
@@ -5543,7 +5543,7 @@
         <a:p>
           <a:pPr algn="l"/>
           <a:r>
-            <a:rPr lang="vi-VN" sz="1040" dirty="0">
+            <a:rPr lang="vi-VN" sz="940" dirty="0">
               <a:solidFill>
                 <a:srgbClr val="A8C4C0"/>
               </a:solidFill>
@@ -5608,7 +5608,7 @@
         <a:p>
           <a:pPr algn="l"/>
           <a:r>
-            <a:rPr lang="vi-VN" sz="1750" dirty="0">
+            <a:rPr lang="vi-VN" sz="1560" dirty="0">
               <a:b/>
               <a:solidFill>
                 <a:srgbClr val="EEFDF8"/>
@@ -5646,7 +5646,7 @@
         <a:p>
           <a:pPr algn="l"/>
           <a:r>
-            <a:rPr lang="vi-VN" sz="1040" dirty="0">
+            <a:rPr lang="vi-VN" sz="940" dirty="0">
               <a:solidFill>
                 <a:srgbClr val="A8C4C0"/>
               </a:solidFill>
@@ -5711,7 +5711,7 @@
         <a:p>
           <a:pPr algn="l"/>
           <a:r>
-            <a:rPr lang="vi-VN" sz="1750" dirty="0">
+            <a:rPr lang="vi-VN" sz="1560" dirty="0">
               <a:b/>
               <a:solidFill>
                 <a:srgbClr val="EEFDF8"/>
@@ -5749,7 +5749,7 @@
         <a:p>
           <a:pPr algn="l"/>
           <a:r>
-            <a:rPr lang="vi-VN" sz="1040" dirty="0">
+            <a:rPr lang="vi-VN" sz="940" dirty="0">
               <a:solidFill>
                 <a:srgbClr val="A8C4C0"/>
               </a:solidFill>
@@ -5814,7 +5814,7 @@
         <a:p>
           <a:pPr algn="l"/>
           <a:r>
-            <a:rPr lang="vi-VN" sz="1750" dirty="0">
+            <a:rPr lang="vi-VN" sz="1560" dirty="0">
               <a:b/>
               <a:solidFill>
                 <a:srgbClr val="EEFDF8"/>
@@ -5852,7 +5852,7 @@
         <a:p>
           <a:pPr algn="l"/>
           <a:r>
-            <a:rPr lang="vi-VN" sz="1040" dirty="0">
+            <a:rPr lang="vi-VN" sz="940" dirty="0">
               <a:solidFill>
                 <a:srgbClr val="A8C4C0"/>
               </a:solidFill>
@@ -6007,7 +6007,7 @@
         <a:p>
           <a:pPr algn="l"/>
           <a:r>
-            <a:rPr lang="vi-VN" sz="3250" dirty="0">
+            <a:rPr lang="vi-VN" sz="2900" dirty="0">
               <a:b/>
               <a:solidFill>
                 <a:srgbClr val="EEFDF8"/>
@@ -6073,7 +6073,7 @@
         <a:p>
           <a:pPr algn="l"/>
           <a:r>
-            <a:rPr lang="vi-VN" sz="3000" dirty="0">
+            <a:rPr lang="vi-VN" sz="2650" dirty="0">
               <a:b/>
               <a:solidFill>
                 <a:srgbClr val="70F0A8"/>
@@ -6111,7 +6111,7 @@
         <a:p>
           <a:pPr algn="l"/>
           <a:r>
-            <a:rPr lang="vi-VN" sz="1050" dirty="0">
+            <a:rPr lang="vi-VN" sz="960" dirty="0">
               <a:solidFill>
                 <a:srgbClr val="A8C4C0"/>
               </a:solidFill>
@@ -6176,7 +6176,7 @@
         <a:p>
           <a:pPr algn="l"/>
           <a:r>
-            <a:rPr lang="vi-VN" sz="3000" dirty="0">
+            <a:rPr lang="vi-VN" sz="2650" dirty="0">
               <a:b/>
               <a:solidFill>
                 <a:srgbClr val="70F0A8"/>
@@ -6214,7 +6214,7 @@
         <a:p>
           <a:pPr algn="l"/>
           <a:r>
-            <a:rPr lang="vi-VN" sz="1050" dirty="0">
+            <a:rPr lang="vi-VN" sz="960" dirty="0">
               <a:solidFill>
                 <a:srgbClr val="A8C4C0"/>
               </a:solidFill>
@@ -6279,7 +6279,7 @@
         <a:p>
           <a:pPr algn="l"/>
           <a:r>
-            <a:rPr lang="vi-VN" sz="3000" dirty="0">
+            <a:rPr lang="vi-VN" sz="2650" dirty="0">
               <a:b/>
               <a:solidFill>
                 <a:srgbClr val="70F0A8"/>
@@ -6317,7 +6317,7 @@
         <a:p>
           <a:pPr algn="l"/>
           <a:r>
-            <a:rPr lang="vi-VN" sz="1050" dirty="0">
+            <a:rPr lang="vi-VN" sz="960" dirty="0">
               <a:solidFill>
                 <a:srgbClr val="A8C4C0"/>
               </a:solidFill>
@@ -6382,7 +6382,7 @@
         <a:p>
           <a:pPr algn="l"/>
           <a:r>
-            <a:rPr lang="vi-VN" sz="1250" dirty="0">
+            <a:rPr lang="vi-VN" sz="1150" dirty="0">
               <a:solidFill>
                 <a:srgbClr val="D8F4EF"/>
               </a:solidFill>
@@ -6537,7 +6537,7 @@
         <a:p>
           <a:pPr algn="l"/>
           <a:r>
-            <a:rPr lang="vi-VN" sz="3250" dirty="0">
+            <a:rPr lang="vi-VN" sz="2900" dirty="0">
               <a:b/>
               <a:solidFill>
                 <a:srgbClr val="EEFDF8"/>
@@ -6603,7 +6603,7 @@
         <a:p>
           <a:pPr algn="l"/>
           <a:r>
-            <a:rPr lang="vi-VN" sz="1750" dirty="0">
+            <a:rPr lang="vi-VN" sz="1560" dirty="0">
               <a:b/>
               <a:solidFill>
                 <a:srgbClr val="EEFDF8"/>
@@ -6641,7 +6641,7 @@
         <a:p>
           <a:pPr algn="l"/>
           <a:r>
-            <a:rPr lang="vi-VN" sz="1040" dirty="0">
+            <a:rPr lang="vi-VN" sz="940" dirty="0">
               <a:solidFill>
                 <a:srgbClr val="A8C4C0"/>
               </a:solidFill>
@@ -6706,7 +6706,7 @@
         <a:p>
           <a:pPr algn="l"/>
           <a:r>
-            <a:rPr lang="vi-VN" sz="1750" dirty="0">
+            <a:rPr lang="vi-VN" sz="1560" dirty="0">
               <a:b/>
               <a:solidFill>
                 <a:srgbClr val="EEFDF8"/>
@@ -6744,7 +6744,7 @@
         <a:p>
           <a:pPr algn="l"/>
           <a:r>
-            <a:rPr lang="vi-VN" sz="1040" dirty="0">
+            <a:rPr lang="vi-VN" sz="940" dirty="0">
               <a:solidFill>
                 <a:srgbClr val="A8C4C0"/>
               </a:solidFill>
@@ -6809,7 +6809,7 @@
         <a:p>
           <a:pPr algn="l"/>
           <a:r>
-            <a:rPr lang="vi-VN" sz="1750" dirty="0">
+            <a:rPr lang="vi-VN" sz="1560" dirty="0">
               <a:b/>
               <a:solidFill>
                 <a:srgbClr val="EEFDF8"/>
@@ -6847,7 +6847,7 @@
         <a:p>
           <a:pPr algn="l"/>
           <a:r>
-            <a:rPr lang="vi-VN" sz="1040" dirty="0">
+            <a:rPr lang="vi-VN" sz="940" dirty="0">
               <a:solidFill>
                 <a:srgbClr val="A8C4C0"/>
               </a:solidFill>
@@ -6912,7 +6912,7 @@
         <a:p>
           <a:pPr algn="l"/>
           <a:r>
-            <a:rPr lang="vi-VN" sz="1750" dirty="0">
+            <a:rPr lang="vi-VN" sz="1560" dirty="0">
               <a:b/>
               <a:solidFill>
                 <a:srgbClr val="EEFDF8"/>
@@ -6950,7 +6950,7 @@
         <a:p>
           <a:pPr algn="l"/>
           <a:r>
-            <a:rPr lang="vi-VN" sz="1040" dirty="0">
+            <a:rPr lang="vi-VN" sz="940" dirty="0">
               <a:solidFill>
                 <a:srgbClr val="A8C4C0"/>
               </a:solidFill>
